--- a/assets/powerpoints/module-n2-classe/C2-l-avis-le-retard-l-absence.pptx
+++ b/assets/powerpoints/module-n2-classe/C2-l-avis-le-retard-l-absence.pptx
@@ -8816,13 +8816,94 @@
               </a:lnSpc>
             </a:pPr>
             <a:r>
+              <a:rPr sz="2000" b="1" i="0">
+                <a:solidFill>
+                  <a:srgbClr val="4B4F52"/>
+                </a:solidFill>
+                <a:latin typeface="Verdana"/>
+              </a:rPr>
+              <a:t>Permis</a:t>
+            </a:r>
+            <a:r>
               <a:rPr sz="2000" b="0" i="0">
                 <a:solidFill>
                   <a:srgbClr val="4B4F52"/>
                 </a:solidFill>
                 <a:latin typeface="Verdana"/>
               </a:rPr>
-              <a:t>&lt;b&gt;Permis&lt;/b&gt; : on a le droit. &lt;b&gt;Autorisé&lt;/b&gt; et &lt;b&gt;possible&lt;/b&gt; veulent dire la même chose. &lt;b&gt;Interdit&lt;/b&gt; : on n'a pas le droit. Et avec &lt;b&gt;devoir&lt;/b&gt;, ce n'est plus un choix : « vous devez téléphoner avant 8 h 30 ».</a:t>
+              <a:t> : on a le droit. </a:t>
+            </a:r>
+            <a:r>
+              <a:rPr sz="2000" b="1" i="0">
+                <a:solidFill>
+                  <a:srgbClr val="4B4F52"/>
+                </a:solidFill>
+                <a:latin typeface="Verdana"/>
+              </a:rPr>
+              <a:t>Autorisé</a:t>
+            </a:r>
+            <a:r>
+              <a:rPr sz="2000" b="0" i="0">
+                <a:solidFill>
+                  <a:srgbClr val="4B4F52"/>
+                </a:solidFill>
+                <a:latin typeface="Verdana"/>
+              </a:rPr>
+              <a:t> et </a:t>
+            </a:r>
+            <a:r>
+              <a:rPr sz="2000" b="1" i="0">
+                <a:solidFill>
+                  <a:srgbClr val="4B4F52"/>
+                </a:solidFill>
+                <a:latin typeface="Verdana"/>
+              </a:rPr>
+              <a:t>possible</a:t>
+            </a:r>
+            <a:r>
+              <a:rPr sz="2000" b="0" i="0">
+                <a:solidFill>
+                  <a:srgbClr val="4B4F52"/>
+                </a:solidFill>
+                <a:latin typeface="Verdana"/>
+              </a:rPr>
+              <a:t> veulent dire la même chose. </a:t>
+            </a:r>
+            <a:r>
+              <a:rPr sz="2000" b="1" i="0">
+                <a:solidFill>
+                  <a:srgbClr val="4B4F52"/>
+                </a:solidFill>
+                <a:latin typeface="Verdana"/>
+              </a:rPr>
+              <a:t>Interdit</a:t>
+            </a:r>
+            <a:r>
+              <a:rPr sz="2000" b="0" i="0">
+                <a:solidFill>
+                  <a:srgbClr val="4B4F52"/>
+                </a:solidFill>
+                <a:latin typeface="Verdana"/>
+              </a:rPr>
+              <a:t> : on n'a pas le droit. Et avec </a:t>
+            </a:r>
+            <a:r>
+              <a:rPr sz="2000" b="1" i="0">
+                <a:solidFill>
+                  <a:srgbClr val="4B4F52"/>
+                </a:solidFill>
+                <a:latin typeface="Verdana"/>
+              </a:rPr>
+              <a:t>devoir</a:t>
+            </a:r>
+            <a:r>
+              <a:rPr sz="2000" b="0" i="0">
+                <a:solidFill>
+                  <a:srgbClr val="4B4F52"/>
+                </a:solidFill>
+                <a:latin typeface="Verdana"/>
+              </a:rPr>
+              <a:t>, ce n'est plus un choix : « vous devez téléphoner avant 8 h 30 ».</a:t>
             </a:r>
           </a:p>
         </p:txBody>
@@ -9169,7 +9250,79 @@
                 </a:solidFill>
                 <a:latin typeface="Verdana"/>
               </a:rPr>
-              <a:t>« Je suis &lt;b&gt;en retard&lt;/b&gt; » : j'arrive, mais après l'heure. « Je suis &lt;b&gt;absent&lt;/b&gt; » : je ne viens pas. Une femme écrit « &lt;b&gt;absente&lt;/b&gt; », avec un e — et le t s'entend. Un &lt;b&gt;congé&lt;/b&gt;, lui, est pour tout le groupe : on ne téléphone pas pour un congé.</a:t>
+              <a:t>« Je suis </a:t>
+            </a:r>
+            <a:r>
+              <a:rPr sz="2000" b="1" i="0">
+                <a:solidFill>
+                  <a:srgbClr val="4B4F52"/>
+                </a:solidFill>
+                <a:latin typeface="Verdana"/>
+              </a:rPr>
+              <a:t>en retard</a:t>
+            </a:r>
+            <a:r>
+              <a:rPr sz="2000" b="0" i="0">
+                <a:solidFill>
+                  <a:srgbClr val="4B4F52"/>
+                </a:solidFill>
+                <a:latin typeface="Verdana"/>
+              </a:rPr>
+              <a:t> » : j'arrive, mais après l'heure. « Je suis </a:t>
+            </a:r>
+            <a:r>
+              <a:rPr sz="2000" b="1" i="0">
+                <a:solidFill>
+                  <a:srgbClr val="4B4F52"/>
+                </a:solidFill>
+                <a:latin typeface="Verdana"/>
+              </a:rPr>
+              <a:t>absent</a:t>
+            </a:r>
+            <a:r>
+              <a:rPr sz="2000" b="0" i="0">
+                <a:solidFill>
+                  <a:srgbClr val="4B4F52"/>
+                </a:solidFill>
+                <a:latin typeface="Verdana"/>
+              </a:rPr>
+              <a:t> » : je ne viens pas. Une femme écrit « </a:t>
+            </a:r>
+            <a:r>
+              <a:rPr sz="2000" b="1" i="0">
+                <a:solidFill>
+                  <a:srgbClr val="4B4F52"/>
+                </a:solidFill>
+                <a:latin typeface="Verdana"/>
+              </a:rPr>
+              <a:t>absente</a:t>
+            </a:r>
+            <a:r>
+              <a:rPr sz="2000" b="0" i="0">
+                <a:solidFill>
+                  <a:srgbClr val="4B4F52"/>
+                </a:solidFill>
+                <a:latin typeface="Verdana"/>
+              </a:rPr>
+              <a:t> », avec un e — et le t s'entend. Un </a:t>
+            </a:r>
+            <a:r>
+              <a:rPr sz="2000" b="1" i="0">
+                <a:solidFill>
+                  <a:srgbClr val="4B4F52"/>
+                </a:solidFill>
+                <a:latin typeface="Verdana"/>
+              </a:rPr>
+              <a:t>congé</a:t>
+            </a:r>
+            <a:r>
+              <a:rPr sz="2000" b="0" i="0">
+                <a:solidFill>
+                  <a:srgbClr val="4B4F52"/>
+                </a:solidFill>
+                <a:latin typeface="Verdana"/>
+              </a:rPr>
+              <a:t>, lui, est pour tout le groupe : on ne téléphone pas pour un congé.</a:t>
             </a:r>
           </a:p>
         </p:txBody>
